--- a/Гаина Г.Е. Презентация.pptx
+++ b/Гаина Г.Е. Презентация.pptx
@@ -224,7 +224,7 @@
         <p:txBody>
           <a:bodyPr/>
           <a:p>
-            <a:fld id="{7FD9AE7D-FBDC-4FD9-BA11-40AA968FCB20}" type="slidenum">
+            <a:fld id="{D2F2B5D1-026F-4E32-806C-FD04319FEBA3}" type="slidenum">
               <a:t>&lt;#&gt;</a:t>
             </a:fld>
           </a:p>
@@ -393,7 +393,7 @@
         <p:txBody>
           <a:bodyPr/>
           <a:p>
-            <a:fld id="{A44E896B-E76E-4FB5-AC00-92F2F89EC58B}" type="slidenum">
+            <a:fld id="{C8B21D18-0050-4C09-B86F-53C52455A256}" type="slidenum">
               <a:t>&lt;#&gt;</a:t>
             </a:fld>
           </a:p>
@@ -476,7 +476,7 @@
         <p:txBody>
           <a:bodyPr/>
           <a:p>
-            <a:fld id="{FA86EA72-8F3B-4A60-BB5F-9D0436E85C3F}" type="slidenum">
+            <a:fld id="{5E3B8F9B-05A6-4CB4-8DA7-87CC1FD01CFB}" type="slidenum">
               <a:t>&lt;#&gt;</a:t>
             </a:fld>
           </a:p>
@@ -691,7 +691,7 @@
         <p:txBody>
           <a:bodyPr/>
           <a:p>
-            <a:fld id="{DD25761C-6151-4D5F-A498-A021D08FC87A}" type="slidenum">
+            <a:fld id="{B77C4D43-532D-4AED-964C-9090C9D60CA0}" type="slidenum">
               <a:t>&lt;#&gt;</a:t>
             </a:fld>
           </a:p>
@@ -774,7 +774,7 @@
         <p:txBody>
           <a:bodyPr/>
           <a:p>
-            <a:fld id="{C0C9021E-DEA9-43B3-95C6-30BC9CF70EB4}" type="slidenum">
+            <a:fld id="{EDBEA10E-A17D-40E8-BF64-4D36D379CEF5}" type="slidenum">
               <a:t>&lt;#&gt;</a:t>
             </a:fld>
           </a:p>
@@ -897,7 +897,7 @@
         <p:txBody>
           <a:bodyPr/>
           <a:p>
-            <a:fld id="{42662834-1FC6-4AB0-816B-FC87FFF4580B}" type="slidenum">
+            <a:fld id="{CF579CF6-B549-417B-B676-87FBA88D152C}" type="slidenum">
               <a:t>&lt;#&gt;</a:t>
             </a:fld>
           </a:p>
@@ -1066,7 +1066,7 @@
         <p:txBody>
           <a:bodyPr/>
           <a:p>
-            <a:fld id="{C852CE1A-D9C9-433B-AE8C-4AD8BB3FFFC3}" type="slidenum">
+            <a:fld id="{A33E9B98-56E7-433B-9B1D-06C5E7C47A11}" type="slidenum">
               <a:t>&lt;#&gt;</a:t>
             </a:fld>
           </a:p>
@@ -1149,7 +1149,7 @@
         <p:txBody>
           <a:bodyPr/>
           <a:p>
-            <a:fld id="{5EE26212-8A52-4C4B-8944-E149DEB5400B}" type="slidenum">
+            <a:fld id="{A6F82388-9E1F-41CF-882E-E9801935BF4B}" type="slidenum">
               <a:t>&lt;#&gt;</a:t>
             </a:fld>
           </a:p>
@@ -1232,7 +1232,7 @@
         <p:txBody>
           <a:bodyPr/>
           <a:p>
-            <a:fld id="{FD7F1686-A901-4D36-9A61-6D48ABF9101B}" type="slidenum">
+            <a:fld id="{48C1DAD4-E260-4FEA-875A-AAE8087E38F8}" type="slidenum">
               <a:t>&lt;#&gt;</a:t>
             </a:fld>
           </a:p>
@@ -1315,7 +1315,7 @@
         <p:txBody>
           <a:bodyPr/>
           <a:p>
-            <a:fld id="{ECACADAE-F014-4C53-B0B6-773D3F263DE9}" type="slidenum">
+            <a:fld id="{8C6B7E32-9860-4E01-B261-594C6F3815DF}" type="slidenum">
               <a:t>&lt;#&gt;</a:t>
             </a:fld>
           </a:p>
@@ -1398,7 +1398,7 @@
         <p:txBody>
           <a:bodyPr/>
           <a:p>
-            <a:fld id="{3C8E1EA8-05FB-4A82-925B-110DD67B3B79}" type="slidenum">
+            <a:fld id="{269AAFBD-7AF2-4D08-933C-93C36E7F98EA}" type="slidenum">
               <a:t>&lt;#&gt;</a:t>
             </a:fld>
           </a:p>
@@ -1481,7 +1481,7 @@
         <p:txBody>
           <a:bodyPr/>
           <a:p>
-            <a:fld id="{57DA8051-0F1C-4C69-9855-13F35BEB2934}" type="slidenum">
+            <a:fld id="{F830DCFC-4F78-4378-B86B-4B5ED810D40F}" type="slidenum">
               <a:t>&lt;#&gt;</a:t>
             </a:fld>
           </a:p>
@@ -1564,7 +1564,7 @@
         <p:txBody>
           <a:bodyPr/>
           <a:p>
-            <a:fld id="{EB344B12-2CF0-4D2E-9D2A-37C0A19F7AFA}" type="slidenum">
+            <a:fld id="{A308BDC2-C723-4EE0-A4DF-1EDCE5453538}" type="slidenum">
               <a:t>&lt;#&gt;</a:t>
             </a:fld>
           </a:p>
@@ -1627,7 +1627,7 @@
         <p:txBody>
           <a:bodyPr/>
           <a:p>
-            <a:fld id="{735D06C2-6A95-468D-BD1E-E13D9FA07810}" type="slidenum">
+            <a:fld id="{4C075AA6-A8ED-49C6-95B0-D400E4F5636B}" type="slidenum">
               <a:t>&lt;#&gt;</a:t>
             </a:fld>
           </a:p>
@@ -2354,7 +2354,16 @@
                 </a:solidFill>
                 <a:latin typeface="Arial"/>
               </a:rPr>
-              <a:t>Название </a:t>
+              <a:t>Названи</a:t>
+            </a:r>
+            <a:r>
+              <a:rPr b="0" lang="ru-RU" sz="2400" spc="-1" strike="noStrike">
+                <a:solidFill>
+                  <a:srgbClr val="92d050"/>
+                </a:solidFill>
+                <a:latin typeface="Arial"/>
+              </a:rPr>
+              <a:t>е </a:t>
             </a:r>
             <a:br>
               <a:rPr sz="2400"/>
@@ -2366,7 +2375,7 @@
                 </a:solidFill>
                 <a:latin typeface="Arial"/>
               </a:rPr>
-              <a:t>выпускной </a:t>
+              <a:t>выпускн</a:t>
             </a:r>
             <a:r>
               <a:rPr b="0" lang="ru-RU" sz="2400" spc="-1" strike="noStrike">
@@ -2375,7 +2384,34 @@
                 </a:solidFill>
                 <a:latin typeface="Arial"/>
               </a:rPr>
-              <a:t>квалификационной </a:t>
+              <a:t>ой </a:t>
+            </a:r>
+            <a:r>
+              <a:rPr b="0" lang="ru-RU" sz="2400" spc="-1" strike="noStrike">
+                <a:solidFill>
+                  <a:srgbClr val="92d050"/>
+                </a:solidFill>
+                <a:latin typeface="Arial"/>
+              </a:rPr>
+              <a:t>квалиф</a:t>
+            </a:r>
+            <a:r>
+              <a:rPr b="0" lang="ru-RU" sz="2400" spc="-1" strike="noStrike">
+                <a:solidFill>
+                  <a:srgbClr val="92d050"/>
+                </a:solidFill>
+                <a:latin typeface="Arial"/>
+              </a:rPr>
+              <a:t>икацион</a:t>
+            </a:r>
+            <a:r>
+              <a:rPr b="0" lang="ru-RU" sz="2400" spc="-1" strike="noStrike">
+                <a:solidFill>
+                  <a:srgbClr val="92d050"/>
+                </a:solidFill>
+                <a:latin typeface="Arial"/>
+              </a:rPr>
+              <a:t>ной </a:t>
             </a:r>
             <a:r>
               <a:rPr b="0" lang="ru-RU" sz="2400" spc="-1" strike="noStrike">
@@ -5847,7 +5883,7 @@
               </a:lnSpc>
               <a:buNone/>
             </a:pPr>
-            <a:fld id="{A3FCCCAE-FA05-4B0A-8B42-6439594A5F8B}" type="slidenum">
+            <a:fld id="{1D6955CF-C70A-4432-A172-B9E052FA80E4}" type="slidenum">
               <a:rPr b="0" lang="ru-RU" sz="2000" spc="-1" strike="noStrike">
                 <a:ln>
                   <a:solidFill>
@@ -7002,7 +7038,7 @@
               </a:lnSpc>
               <a:buNone/>
             </a:pPr>
-            <a:fld id="{3C9A53BF-B07F-468B-BCED-0B0EACD3A257}" type="slidenum">
+            <a:fld id="{46E10809-BE40-46D9-BF1B-88C50C50C263}" type="slidenum">
               <a:rPr b="0" lang="ru-RU" sz="2000" spc="-1" strike="noStrike">
                 <a:ln>
                   <a:solidFill>
@@ -7982,7 +8018,7 @@
               </a:lnSpc>
               <a:buNone/>
             </a:pPr>
-            <a:fld id="{41FEB9CF-F264-4E31-9D9E-ED5A92F53F6D}" type="slidenum">
+            <a:fld id="{E45866F9-FDAE-41F8-8746-F0FEF717238C}" type="slidenum">
               <a:rPr b="0" lang="ru-RU" sz="2000" spc="-1" strike="noStrike">
                 <a:ln>
                   <a:solidFill>
@@ -9316,7 +9352,7 @@
               </a:lnSpc>
               <a:buNone/>
             </a:pPr>
-            <a:fld id="{9FDB0C6D-B0F0-4CF4-8E67-E2E11387FCA1}" type="slidenum">
+            <a:fld id="{0347E913-3B06-4967-B400-5264EC58D339}" type="slidenum">
               <a:rPr b="0" lang="ru-RU" sz="2000" spc="-1" strike="noStrike">
                 <a:ln>
                   <a:solidFill>
@@ -10452,7 +10488,16 @@
                 </a:solidFill>
                 <a:latin typeface="Calibri"/>
               </a:rPr>
-              <a:t>Образец текста</a:t>
+              <a:t>Образец </a:t>
+            </a:r>
+            <a:r>
+              <a:rPr b="0" lang="ru-RU" sz="2800" spc="-1" strike="noStrike">
+                <a:solidFill>
+                  <a:schemeClr val="dk1"/>
+                </a:solidFill>
+                <a:latin typeface="Calibri"/>
+              </a:rPr>
+              <a:t>текста</a:t>
             </a:r>
             <a:endParaRPr b="0" lang="en-US" sz="2800" spc="-1" strike="noStrike">
               <a:solidFill>
@@ -10482,7 +10527,16 @@
                 </a:solidFill>
                 <a:latin typeface="Calibri"/>
               </a:rPr>
-              <a:t>Второй уровень</a:t>
+              <a:t>Второй </a:t>
+            </a:r>
+            <a:r>
+              <a:rPr b="0" lang="ru-RU" sz="2400" spc="-1" strike="noStrike">
+                <a:solidFill>
+                  <a:schemeClr val="dk1"/>
+                </a:solidFill>
+                <a:latin typeface="Calibri"/>
+              </a:rPr>
+              <a:t>уровень</a:t>
             </a:r>
             <a:endParaRPr b="0" lang="en-US" sz="2400" spc="-1" strike="noStrike">
               <a:solidFill>
@@ -10512,7 +10566,34 @@
                 </a:solidFill>
                 <a:latin typeface="Calibri"/>
               </a:rPr>
-              <a:t>Третий уровень</a:t>
+              <a:t>Трети</a:t>
+            </a:r>
+            <a:r>
+              <a:rPr b="0" lang="ru-RU" sz="2000" spc="-1" strike="noStrike">
+                <a:solidFill>
+                  <a:schemeClr val="dk1"/>
+                </a:solidFill>
+                <a:latin typeface="Calibri"/>
+              </a:rPr>
+              <a:t>й </a:t>
+            </a:r>
+            <a:r>
+              <a:rPr b="0" lang="ru-RU" sz="2000" spc="-1" strike="noStrike">
+                <a:solidFill>
+                  <a:schemeClr val="dk1"/>
+                </a:solidFill>
+                <a:latin typeface="Calibri"/>
+              </a:rPr>
+              <a:t>урове</a:t>
+            </a:r>
+            <a:r>
+              <a:rPr b="0" lang="ru-RU" sz="2000" spc="-1" strike="noStrike">
+                <a:solidFill>
+                  <a:schemeClr val="dk1"/>
+                </a:solidFill>
+                <a:latin typeface="Calibri"/>
+              </a:rPr>
+              <a:t>нь</a:t>
             </a:r>
             <a:endParaRPr b="0" lang="en-US" sz="2000" spc="-1" strike="noStrike">
               <a:solidFill>
@@ -10542,7 +10623,61 @@
                 </a:solidFill>
                 <a:latin typeface="Calibri"/>
               </a:rPr>
-              <a:t>Четвертый уровень</a:t>
+              <a:t>Чет</a:t>
+            </a:r>
+            <a:r>
+              <a:rPr b="0" lang="ru-RU" sz="1800" spc="-1" strike="noStrike">
+                <a:solidFill>
+                  <a:schemeClr val="dk1"/>
+                </a:solidFill>
+                <a:latin typeface="Calibri"/>
+              </a:rPr>
+              <a:t>вер</a:t>
+            </a:r>
+            <a:r>
+              <a:rPr b="0" lang="ru-RU" sz="1800" spc="-1" strike="noStrike">
+                <a:solidFill>
+                  <a:schemeClr val="dk1"/>
+                </a:solidFill>
+                <a:latin typeface="Calibri"/>
+              </a:rPr>
+              <a:t>ты</a:t>
+            </a:r>
+            <a:r>
+              <a:rPr b="0" lang="ru-RU" sz="1800" spc="-1" strike="noStrike">
+                <a:solidFill>
+                  <a:schemeClr val="dk1"/>
+                </a:solidFill>
+                <a:latin typeface="Calibri"/>
+              </a:rPr>
+              <a:t>й </a:t>
+            </a:r>
+            <a:r>
+              <a:rPr b="0" lang="ru-RU" sz="1800" spc="-1" strike="noStrike">
+                <a:solidFill>
+                  <a:schemeClr val="dk1"/>
+                </a:solidFill>
+                <a:latin typeface="Calibri"/>
+              </a:rPr>
+              <a:t>уро</a:t>
+            </a:r>
+            <a:r>
+              <a:rPr b="0" lang="ru-RU" sz="1800" spc="-1" strike="noStrike">
+                <a:solidFill>
+                  <a:schemeClr val="dk1"/>
+                </a:solidFill>
+                <a:latin typeface="Calibri"/>
+              </a:rPr>
+              <a:t>вен</a:t>
+            </a:r>
+            <a:r>
+              <a:rPr b="0" lang="ru-RU" sz="1800" spc="-1" strike="noStrike">
+                <a:solidFill>
+                  <a:schemeClr val="dk1"/>
+                </a:solidFill>
+                <a:latin typeface="Calibri"/>
+              </a:rPr>
+              <a:t>ь</a:t>
             </a:r>
             <a:endParaRPr b="0" lang="en-US" sz="1800" spc="-1" strike="noStrike">
               <a:solidFill>
@@ -10572,7 +10707,115 @@
                 </a:solidFill>
                 <a:latin typeface="Calibri"/>
               </a:rPr>
-              <a:t>Пятый уровень</a:t>
+              <a:t>П</a:t>
+            </a:r>
+            <a:r>
+              <a:rPr b="0" lang="ru-RU" sz="1800" spc="-1" strike="noStrike">
+                <a:solidFill>
+                  <a:schemeClr val="dk1"/>
+                </a:solidFill>
+                <a:latin typeface="Calibri"/>
+              </a:rPr>
+              <a:t>я</a:t>
+            </a:r>
+            <a:r>
+              <a:rPr b="0" lang="ru-RU" sz="1800" spc="-1" strike="noStrike">
+                <a:solidFill>
+                  <a:schemeClr val="dk1"/>
+                </a:solidFill>
+                <a:latin typeface="Calibri"/>
+              </a:rPr>
+              <a:t>т</a:t>
+            </a:r>
+            <a:r>
+              <a:rPr b="0" lang="ru-RU" sz="1800" spc="-1" strike="noStrike">
+                <a:solidFill>
+                  <a:schemeClr val="dk1"/>
+                </a:solidFill>
+                <a:latin typeface="Calibri"/>
+              </a:rPr>
+              <a:t>ы</a:t>
+            </a:r>
+            <a:r>
+              <a:rPr b="0" lang="ru-RU" sz="1800" spc="-1" strike="noStrike">
+                <a:solidFill>
+                  <a:schemeClr val="dk1"/>
+                </a:solidFill>
+                <a:latin typeface="Calibri"/>
+              </a:rPr>
+              <a:t>й</a:t>
+            </a:r>
+            <a:r>
+              <a:rPr b="0" lang="ru-RU" sz="1800" spc="-1" strike="noStrike">
+                <a:solidFill>
+                  <a:schemeClr val="dk1"/>
+                </a:solidFill>
+                <a:latin typeface="Calibri"/>
+              </a:rPr>
+              <a:t> </a:t>
+            </a:r>
+            <a:r>
+              <a:rPr b="0" lang="ru-RU" sz="1800" spc="-1" strike="noStrike">
+                <a:solidFill>
+                  <a:schemeClr val="dk1"/>
+                </a:solidFill>
+                <a:latin typeface="Calibri"/>
+              </a:rPr>
+              <a:t>у</a:t>
+            </a:r>
+            <a:r>
+              <a:rPr b="0" lang="ru-RU" sz="1800" spc="-1" strike="noStrike">
+                <a:solidFill>
+                  <a:schemeClr val="dk1"/>
+                </a:solidFill>
+                <a:latin typeface="Calibri"/>
+              </a:rPr>
+              <a:t>р</a:t>
+            </a:r>
+            <a:r>
+              <a:rPr b="0" lang="ru-RU" sz="1800" spc="-1" strike="noStrike">
+                <a:solidFill>
+                  <a:schemeClr val="dk1"/>
+                </a:solidFill>
+                <a:latin typeface="Calibri"/>
+              </a:rPr>
+              <a:t>о</a:t>
+            </a:r>
+            <a:r>
+              <a:rPr b="0" lang="ru-RU" sz="1800" spc="-1" strike="noStrike">
+                <a:solidFill>
+                  <a:schemeClr val="dk1"/>
+                </a:solidFill>
+                <a:latin typeface="Calibri"/>
+              </a:rPr>
+              <a:t>в</a:t>
+            </a:r>
+            <a:r>
+              <a:rPr b="0" lang="ru-RU" sz="1800" spc="-1" strike="noStrike">
+                <a:solidFill>
+                  <a:schemeClr val="dk1"/>
+                </a:solidFill>
+                <a:latin typeface="Calibri"/>
+              </a:rPr>
+              <a:t>е</a:t>
+            </a:r>
+            <a:r>
+              <a:rPr b="0" lang="ru-RU" sz="1800" spc="-1" strike="noStrike">
+                <a:solidFill>
+                  <a:schemeClr val="dk1"/>
+                </a:solidFill>
+                <a:latin typeface="Calibri"/>
+              </a:rPr>
+              <a:t>н</a:t>
+            </a:r>
+            <a:r>
+              <a:rPr b="0" lang="ru-RU" sz="1800" spc="-1" strike="noStrike">
+                <a:solidFill>
+                  <a:schemeClr val="dk1"/>
+                </a:solidFill>
+                <a:latin typeface="Calibri"/>
+              </a:rPr>
+              <a:t>ь</a:t>
             </a:r>
             <a:endParaRPr b="0" lang="en-US" sz="1800" spc="-1" strike="noStrike">
               <a:solidFill>
@@ -10766,7 +11009,7 @@
               </a:lnSpc>
               <a:buNone/>
             </a:pPr>
-            <a:fld id="{18FC5D76-312C-40D9-9D2A-B99DE23487D9}" type="slidenum">
+            <a:fld id="{80FBB592-397F-43A0-91A6-1523F3B7445B}" type="slidenum">
               <a:rPr b="0" lang="ru-RU" sz="2000" spc="-1" strike="noStrike">
                 <a:ln>
                   <a:solidFill>
@@ -11742,7 +11985,7 @@
               </a:lnSpc>
               <a:buNone/>
             </a:pPr>
-            <a:fld id="{AB4F6376-D3EE-4280-9CAB-E8390E287CED}" type="slidenum">
+            <a:fld id="{30F158BA-D817-4364-8375-25A246E74BDB}" type="slidenum">
               <a:rPr b="0" lang="ru-RU" sz="2000" spc="-1" strike="noStrike">
                 <a:ln>
                   <a:solidFill>
@@ -12546,16 +12789,7 @@
                 </a:solidFill>
                 <a:latin typeface="Calibri"/>
               </a:rPr>
-              <a:t>Образец </a:t>
-            </a:r>
-            <a:r>
-              <a:rPr b="0" lang="ru-RU" sz="2800" spc="-1" strike="noStrike">
-                <a:solidFill>
-                  <a:schemeClr val="dk1"/>
-                </a:solidFill>
-                <a:latin typeface="Calibri"/>
-              </a:rPr>
-              <a:t>текста</a:t>
+              <a:t>Образец текста</a:t>
             </a:r>
             <a:endParaRPr b="0" lang="en-US" sz="2800" spc="-1" strike="noStrike">
               <a:solidFill>
@@ -12585,16 +12819,7 @@
                 </a:solidFill>
                 <a:latin typeface="Calibri"/>
               </a:rPr>
-              <a:t>Второй </a:t>
-            </a:r>
-            <a:r>
-              <a:rPr b="0" lang="ru-RU" sz="2400" spc="-1" strike="noStrike">
-                <a:solidFill>
-                  <a:schemeClr val="dk1"/>
-                </a:solidFill>
-                <a:latin typeface="Calibri"/>
-              </a:rPr>
-              <a:t>уровень</a:t>
+              <a:t>Второй уровень</a:t>
             </a:r>
             <a:endParaRPr b="0" lang="en-US" sz="2400" spc="-1" strike="noStrike">
               <a:solidFill>
@@ -12624,34 +12849,7 @@
                 </a:solidFill>
                 <a:latin typeface="Calibri"/>
               </a:rPr>
-              <a:t>Трети</a:t>
-            </a:r>
-            <a:r>
-              <a:rPr b="0" lang="ru-RU" sz="2000" spc="-1" strike="noStrike">
-                <a:solidFill>
-                  <a:schemeClr val="dk1"/>
-                </a:solidFill>
-                <a:latin typeface="Calibri"/>
-              </a:rPr>
-              <a:t>й </a:t>
-            </a:r>
-            <a:r>
-              <a:rPr b="0" lang="ru-RU" sz="2000" spc="-1" strike="noStrike">
-                <a:solidFill>
-                  <a:schemeClr val="dk1"/>
-                </a:solidFill>
-                <a:latin typeface="Calibri"/>
-              </a:rPr>
-              <a:t>урове</a:t>
-            </a:r>
-            <a:r>
-              <a:rPr b="0" lang="ru-RU" sz="2000" spc="-1" strike="noStrike">
-                <a:solidFill>
-                  <a:schemeClr val="dk1"/>
-                </a:solidFill>
-                <a:latin typeface="Calibri"/>
-              </a:rPr>
-              <a:t>нь</a:t>
+              <a:t>Третий уровень</a:t>
             </a:r>
             <a:endParaRPr b="0" lang="en-US" sz="2000" spc="-1" strike="noStrike">
               <a:solidFill>
@@ -12681,61 +12879,7 @@
                 </a:solidFill>
                 <a:latin typeface="Calibri"/>
               </a:rPr>
-              <a:t>Чет</a:t>
-            </a:r>
-            <a:r>
-              <a:rPr b="0" lang="ru-RU" sz="1800" spc="-1" strike="noStrike">
-                <a:solidFill>
-                  <a:schemeClr val="dk1"/>
-                </a:solidFill>
-                <a:latin typeface="Calibri"/>
-              </a:rPr>
-              <a:t>вер</a:t>
-            </a:r>
-            <a:r>
-              <a:rPr b="0" lang="ru-RU" sz="1800" spc="-1" strike="noStrike">
-                <a:solidFill>
-                  <a:schemeClr val="dk1"/>
-                </a:solidFill>
-                <a:latin typeface="Calibri"/>
-              </a:rPr>
-              <a:t>ты</a:t>
-            </a:r>
-            <a:r>
-              <a:rPr b="0" lang="ru-RU" sz="1800" spc="-1" strike="noStrike">
-                <a:solidFill>
-                  <a:schemeClr val="dk1"/>
-                </a:solidFill>
-                <a:latin typeface="Calibri"/>
-              </a:rPr>
-              <a:t>й </a:t>
-            </a:r>
-            <a:r>
-              <a:rPr b="0" lang="ru-RU" sz="1800" spc="-1" strike="noStrike">
-                <a:solidFill>
-                  <a:schemeClr val="dk1"/>
-                </a:solidFill>
-                <a:latin typeface="Calibri"/>
-              </a:rPr>
-              <a:t>уро</a:t>
-            </a:r>
-            <a:r>
-              <a:rPr b="0" lang="ru-RU" sz="1800" spc="-1" strike="noStrike">
-                <a:solidFill>
-                  <a:schemeClr val="dk1"/>
-                </a:solidFill>
-                <a:latin typeface="Calibri"/>
-              </a:rPr>
-              <a:t>вен</a:t>
-            </a:r>
-            <a:r>
-              <a:rPr b="0" lang="ru-RU" sz="1800" spc="-1" strike="noStrike">
-                <a:solidFill>
-                  <a:schemeClr val="dk1"/>
-                </a:solidFill>
-                <a:latin typeface="Calibri"/>
-              </a:rPr>
-              <a:t>ь</a:t>
+              <a:t>Четвертый уровень</a:t>
             </a:r>
             <a:endParaRPr b="0" lang="en-US" sz="1800" spc="-1" strike="noStrike">
               <a:solidFill>
@@ -12765,115 +12909,7 @@
                 </a:solidFill>
                 <a:latin typeface="Calibri"/>
               </a:rPr>
-              <a:t>П</a:t>
-            </a:r>
-            <a:r>
-              <a:rPr b="0" lang="ru-RU" sz="1800" spc="-1" strike="noStrike">
-                <a:solidFill>
-                  <a:schemeClr val="dk1"/>
-                </a:solidFill>
-                <a:latin typeface="Calibri"/>
-              </a:rPr>
-              <a:t>я</a:t>
-            </a:r>
-            <a:r>
-              <a:rPr b="0" lang="ru-RU" sz="1800" spc="-1" strike="noStrike">
-                <a:solidFill>
-                  <a:schemeClr val="dk1"/>
-                </a:solidFill>
-                <a:latin typeface="Calibri"/>
-              </a:rPr>
-              <a:t>т</a:t>
-            </a:r>
-            <a:r>
-              <a:rPr b="0" lang="ru-RU" sz="1800" spc="-1" strike="noStrike">
-                <a:solidFill>
-                  <a:schemeClr val="dk1"/>
-                </a:solidFill>
-                <a:latin typeface="Calibri"/>
-              </a:rPr>
-              <a:t>ы</a:t>
-            </a:r>
-            <a:r>
-              <a:rPr b="0" lang="ru-RU" sz="1800" spc="-1" strike="noStrike">
-                <a:solidFill>
-                  <a:schemeClr val="dk1"/>
-                </a:solidFill>
-                <a:latin typeface="Calibri"/>
-              </a:rPr>
-              <a:t>й</a:t>
-            </a:r>
-            <a:r>
-              <a:rPr b="0" lang="ru-RU" sz="1800" spc="-1" strike="noStrike">
-                <a:solidFill>
-                  <a:schemeClr val="dk1"/>
-                </a:solidFill>
-                <a:latin typeface="Calibri"/>
-              </a:rPr>
-              <a:t> </a:t>
-            </a:r>
-            <a:r>
-              <a:rPr b="0" lang="ru-RU" sz="1800" spc="-1" strike="noStrike">
-                <a:solidFill>
-                  <a:schemeClr val="dk1"/>
-                </a:solidFill>
-                <a:latin typeface="Calibri"/>
-              </a:rPr>
-              <a:t>у</a:t>
-            </a:r>
-            <a:r>
-              <a:rPr b="0" lang="ru-RU" sz="1800" spc="-1" strike="noStrike">
-                <a:solidFill>
-                  <a:schemeClr val="dk1"/>
-                </a:solidFill>
-                <a:latin typeface="Calibri"/>
-              </a:rPr>
-              <a:t>р</a:t>
-            </a:r>
-            <a:r>
-              <a:rPr b="0" lang="ru-RU" sz="1800" spc="-1" strike="noStrike">
-                <a:solidFill>
-                  <a:schemeClr val="dk1"/>
-                </a:solidFill>
-                <a:latin typeface="Calibri"/>
-              </a:rPr>
-              <a:t>о</a:t>
-            </a:r>
-            <a:r>
-              <a:rPr b="0" lang="ru-RU" sz="1800" spc="-1" strike="noStrike">
-                <a:solidFill>
-                  <a:schemeClr val="dk1"/>
-                </a:solidFill>
-                <a:latin typeface="Calibri"/>
-              </a:rPr>
-              <a:t>в</a:t>
-            </a:r>
-            <a:r>
-              <a:rPr b="0" lang="ru-RU" sz="1800" spc="-1" strike="noStrike">
-                <a:solidFill>
-                  <a:schemeClr val="dk1"/>
-                </a:solidFill>
-                <a:latin typeface="Calibri"/>
-              </a:rPr>
-              <a:t>е</a:t>
-            </a:r>
-            <a:r>
-              <a:rPr b="0" lang="ru-RU" sz="1800" spc="-1" strike="noStrike">
-                <a:solidFill>
-                  <a:schemeClr val="dk1"/>
-                </a:solidFill>
-                <a:latin typeface="Calibri"/>
-              </a:rPr>
-              <a:t>н</a:t>
-            </a:r>
-            <a:r>
-              <a:rPr b="0" lang="ru-RU" sz="1800" spc="-1" strike="noStrike">
-                <a:solidFill>
-                  <a:schemeClr val="dk1"/>
-                </a:solidFill>
-                <a:latin typeface="Calibri"/>
-              </a:rPr>
-              <a:t>ь</a:t>
+              <a:t>Пятый уровень</a:t>
             </a:r>
             <a:endParaRPr b="0" lang="en-US" sz="1800" spc="-1" strike="noStrike">
               <a:solidFill>
@@ -13067,7 +13103,7 @@
               </a:lnSpc>
               <a:buNone/>
             </a:pPr>
-            <a:fld id="{9B4F9A20-D21A-4077-AC78-561EE44F1895}" type="slidenum">
+            <a:fld id="{9647E6F0-1690-4C69-A820-54057D61C4A6}" type="slidenum">
               <a:rPr b="0" lang="ru-RU" sz="2000" spc="-1" strike="noStrike">
                 <a:ln>
                   <a:solidFill>
@@ -13991,7 +14027,7 @@
               </a:lnSpc>
               <a:buNone/>
             </a:pPr>
-            <a:fld id="{2A1B4026-09DF-48F4-B144-2F955ECB4FBD}" type="slidenum">
+            <a:fld id="{4DDE8D7F-84B5-4D2A-A97D-84B935A3FD5E}" type="slidenum">
               <a:rPr b="0" lang="ru-RU" sz="2000" spc="-1" strike="noStrike">
                 <a:ln>
                   <a:solidFill>
@@ -14073,7 +14109,16 @@
                 </a:solidFill>
                 <a:latin typeface="Calibri"/>
               </a:rPr>
-              <a:t>Click to edit the title text </a:t>
+              <a:t>Click to edit </a:t>
+            </a:r>
+            <a:r>
+              <a:rPr b="0" lang="en-US" sz="1800" spc="-1" strike="noStrike">
+                <a:solidFill>
+                  <a:schemeClr val="dk1"/>
+                </a:solidFill>
+                <a:latin typeface="Calibri"/>
+              </a:rPr>
+              <a:t>the title text </a:t>
             </a:r>
             <a:r>
               <a:rPr b="0" lang="en-US" sz="1800" spc="-1" strike="noStrike">
@@ -14142,16 +14187,7 @@
                 </a:solidFill>
                 <a:latin typeface="Calibri"/>
               </a:rPr>
-              <a:t>Click to edit the outline text </a:t>
-            </a:r>
-            <a:r>
-              <a:rPr b="0" lang="en-US" sz="2800" spc="-1" strike="noStrike">
-                <a:solidFill>
-                  <a:schemeClr val="dk1"/>
-                </a:solidFill>
-                <a:latin typeface="Calibri"/>
-              </a:rPr>
-              <a:t>format</a:t>
+              <a:t>Click to edit the outline text format</a:t>
             </a:r>
             <a:endParaRPr b="0" lang="en-US" sz="2800" spc="-1" strike="noStrike">
               <a:solidFill>
@@ -14337,16 +14373,7 @@
                 </a:solidFill>
                 <a:latin typeface="Calibri"/>
               </a:rPr>
-              <a:t>Seventh Outline </a:t>
-            </a:r>
-            <a:r>
-              <a:rPr b="0" lang="en-US" sz="2000" spc="-1" strike="noStrike">
-                <a:solidFill>
-                  <a:schemeClr val="dk1"/>
-                </a:solidFill>
-                <a:latin typeface="Calibri"/>
-              </a:rPr>
-              <a:t>Level</a:t>
+              <a:t>Seventh Outline Level</a:t>
             </a:r>
             <a:endParaRPr b="0" lang="en-US" sz="2000" spc="-1" strike="noStrike">
               <a:solidFill>
@@ -15258,7 +15285,7 @@
               </a:lnSpc>
               <a:buNone/>
             </a:pPr>
-            <a:fld id="{2AD410A0-446E-4B4E-BE26-391816BD4450}" type="slidenum">
+            <a:fld id="{F267B185-CC05-4CB8-913B-9309F44EAD03}" type="slidenum">
               <a:rPr b="0" lang="ru-RU" sz="2000" spc="-1" strike="noStrike">
                 <a:ln>
                   <a:solidFill>
@@ -15364,34 +15391,7 @@
                 </a:solidFill>
                 <a:latin typeface="Calibri Light"/>
               </a:rPr>
-              <a:t>Образе</a:t>
-            </a:r>
-            <a:r>
-              <a:rPr b="0" lang="ru-RU" sz="3200" spc="-1" strike="noStrike">
-                <a:solidFill>
-                  <a:schemeClr val="dk1"/>
-                </a:solidFill>
-                <a:latin typeface="Calibri Light"/>
-              </a:rPr>
-              <a:t>ц </a:t>
-            </a:r>
-            <a:r>
-              <a:rPr b="0" lang="ru-RU" sz="3200" spc="-1" strike="noStrike">
-                <a:solidFill>
-                  <a:schemeClr val="dk1"/>
-                </a:solidFill>
-                <a:latin typeface="Calibri Light"/>
-              </a:rPr>
-              <a:t>заголов</a:t>
-            </a:r>
-            <a:r>
-              <a:rPr b="0" lang="ru-RU" sz="3200" spc="-1" strike="noStrike">
-                <a:solidFill>
-                  <a:schemeClr val="dk1"/>
-                </a:solidFill>
-                <a:latin typeface="Calibri Light"/>
-              </a:rPr>
-              <a:t>ка</a:t>
+              <a:t>Образец заголовка</a:t>
             </a:r>
             <a:endParaRPr b="0" lang="en-US" sz="3200" spc="-1" strike="noStrike">
               <a:solidFill>
@@ -16540,7 +16540,7 @@
               </a:lnSpc>
               <a:buNone/>
             </a:pPr>
-            <a:fld id="{99409CF2-3EAE-4A4D-9A2F-2CDC28ED0926}" type="slidenum">
+            <a:fld id="{2BA0D8D9-A201-48AE-9E23-E07F1C75FC16}" type="slidenum">
               <a:rPr b="0" lang="ru-RU" sz="2000" spc="-1" strike="noStrike">
                 <a:ln>
                   <a:solidFill>
@@ -16646,34 +16646,7 @@
                 </a:solidFill>
                 <a:latin typeface="Calibri Light"/>
               </a:rPr>
-              <a:t>Образе</a:t>
-            </a:r>
-            <a:r>
-              <a:rPr b="0" lang="ru-RU" sz="3200" spc="-1" strike="noStrike">
-                <a:solidFill>
-                  <a:schemeClr val="dk1"/>
-                </a:solidFill>
-                <a:latin typeface="Calibri Light"/>
-              </a:rPr>
-              <a:t>ц </a:t>
-            </a:r>
-            <a:r>
-              <a:rPr b="0" lang="ru-RU" sz="3200" spc="-1" strike="noStrike">
-                <a:solidFill>
-                  <a:schemeClr val="dk1"/>
-                </a:solidFill>
-                <a:latin typeface="Calibri Light"/>
-              </a:rPr>
-              <a:t>заголов</a:t>
-            </a:r>
-            <a:r>
-              <a:rPr b="0" lang="ru-RU" sz="3200" spc="-1" strike="noStrike">
-                <a:solidFill>
-                  <a:schemeClr val="dk1"/>
-                </a:solidFill>
-                <a:latin typeface="Calibri Light"/>
-              </a:rPr>
-              <a:t>ка</a:t>
+              <a:t>Образец заголовка</a:t>
             </a:r>
             <a:endParaRPr b="0" lang="en-US" sz="3200" spc="-1" strike="noStrike">
               <a:solidFill>
@@ -18022,7 +17995,7 @@
               </a:lnSpc>
               <a:buNone/>
             </a:pPr>
-            <a:fld id="{BA803634-BA02-43BA-8F3D-C47F3E0EEBE0}" type="slidenum">
+            <a:fld id="{45C9A3A9-AD35-4C14-85D9-0721B0838DB2}" type="slidenum">
               <a:rPr b="0" lang="ru-RU" sz="2000" spc="-1" strike="noStrike">
                 <a:ln>
                   <a:solidFill>
@@ -18128,7 +18101,16 @@
                 </a:solidFill>
                 <a:latin typeface="Calibri Light"/>
               </a:rPr>
-              <a:t>Образец заголовка</a:t>
+              <a:t>Образец </a:t>
+            </a:r>
+            <a:r>
+              <a:rPr b="0" lang="ru-RU" sz="3200" spc="-1" strike="noStrike">
+                <a:solidFill>
+                  <a:schemeClr val="dk1"/>
+                </a:solidFill>
+                <a:latin typeface="Calibri Light"/>
+              </a:rPr>
+              <a:t>заголовка</a:t>
             </a:r>
             <a:endParaRPr b="0" lang="en-US" sz="3200" spc="-1" strike="noStrike">
               <a:solidFill>
@@ -18955,7 +18937,16 @@
                 </a:solidFill>
                 <a:latin typeface="Calibri Light"/>
               </a:rPr>
-              <a:t>Образец заголовка</a:t>
+              <a:t>Образец </a:t>
+            </a:r>
+            <a:r>
+              <a:rPr b="0" lang="ru-RU" sz="3600" spc="-1" strike="noStrike">
+                <a:solidFill>
+                  <a:schemeClr val="dk1"/>
+                </a:solidFill>
+                <a:latin typeface="Calibri Light"/>
+              </a:rPr>
+              <a:t>заголовка</a:t>
             </a:r>
             <a:endParaRPr b="0" lang="en-US" sz="3600" spc="-1" strike="noStrike">
               <a:solidFill>
@@ -19328,7 +19319,7 @@
               </a:lnSpc>
               <a:buNone/>
             </a:pPr>
-            <a:fld id="{760B5999-A649-4AA8-AE98-59EEC6FD61AE}" type="slidenum">
+            <a:fld id="{CD09E3FE-72FA-4B2C-A936-52310E6B04F3}" type="slidenum">
               <a:rPr b="0" lang="ru-RU" sz="2000" spc="-1" strike="noStrike">
                 <a:ln>
                   <a:solidFill>
@@ -20427,7 +20418,7 @@
               </a:lnSpc>
               <a:buNone/>
             </a:pPr>
-            <a:fld id="{95E8CD50-9F3B-406A-9719-D616C98F1DE3}" type="slidenum">
+            <a:fld id="{DDE46FEB-FAE2-4628-8253-48C33ACF09F2}" type="slidenum">
               <a:rPr b="0" lang="ru-RU" sz="2000" spc="-1" strike="noStrike">
                 <a:ln>
                   <a:solidFill>
@@ -21273,7 +21264,7 @@
               </a:lnSpc>
               <a:buNone/>
             </a:pPr>
-            <a:fld id="{692CBB62-2F7E-4667-8C01-14EC73C94DC9}" type="slidenum">
+            <a:fld id="{B54E8FC3-736B-47A8-81F6-B92DDCB14FE4}" type="slidenum">
               <a:rPr b="0" lang="ru-RU" sz="1200" spc="-1" strike="noStrike">
                 <a:ln>
                   <a:solidFill>
@@ -21531,7 +21522,16 @@
                 </a:solidFill>
                 <a:latin typeface="Calibri"/>
               </a:rPr>
-              <a:t>Seventh Outline Level</a:t>
+              <a:t>Seventh Outline </a:t>
+            </a:r>
+            <a:r>
+              <a:rPr b="0" lang="en-US" sz="1800" spc="-1" strike="noStrike">
+                <a:solidFill>
+                  <a:schemeClr val="dk1"/>
+                </a:solidFill>
+                <a:latin typeface="Calibri"/>
+              </a:rPr>
+              <a:t>Level</a:t>
             </a:r>
             <a:endParaRPr b="0" lang="en-US" sz="1800" spc="-1" strike="noStrike">
               <a:solidFill>
@@ -22503,7 +22503,25 @@
                 </a:solidFill>
                 <a:latin typeface="Arial"/>
               </a:rPr>
-              <a:t>выпускной квалификационной работы</a:t>
+              <a:t>выпускной </a:t>
+            </a:r>
+            <a:r>
+              <a:rPr b="0" lang="ru-RU" sz="2400" spc="-1" strike="noStrike">
+                <a:solidFill>
+                  <a:srgbClr val="92d050"/>
+                </a:solidFill>
+                <a:latin typeface="Arial"/>
+              </a:rPr>
+              <a:t>квалификационно</a:t>
+            </a:r>
+            <a:r>
+              <a:rPr b="0" lang="ru-RU" sz="2400" spc="-1" strike="noStrike">
+                <a:solidFill>
+                  <a:srgbClr val="92d050"/>
+                </a:solidFill>
+                <a:latin typeface="Arial"/>
+              </a:rPr>
+              <a:t>й работы</a:t>
             </a:r>
             <a:endParaRPr b="0" lang="en-US" sz="2400" spc="-1" strike="noStrike">
               <a:solidFill>
@@ -23950,7 +23968,7 @@
         <p:txBody>
           <a:bodyPr/>
           <a:p>
-            <a:fld id="{876A6435-B20E-4855-8F20-3ECE99EBEE8F}" type="slidenum">
+            <a:fld id="{1429A16F-B3C2-408F-BA20-6744DBAFEE8A}" type="slidenum">
               <a:t>10</a:t>
             </a:fld>
           </a:p>
@@ -24570,7 +24588,7 @@
         <p:txBody>
           <a:bodyPr/>
           <a:p>
-            <a:fld id="{E80CD014-E2F5-48FA-92B0-30321FE6C62B}" type="slidenum">
+            <a:fld id="{6878429F-468F-4287-AAA5-D413B59076AA}" type="slidenum">
               <a:t>11</a:t>
             </a:fld>
           </a:p>
@@ -24788,7 +24806,7 @@
         <p:txBody>
           <a:bodyPr/>
           <a:p>
-            <a:fld id="{C468C767-A828-47F7-AB18-14AB5C72229A}" type="slidenum">
+            <a:fld id="{F0AF5F31-DFA8-4E40-818D-D8C6F0F8A4D9}" type="slidenum">
               <a:t>12</a:t>
             </a:fld>
           </a:p>
@@ -26204,7 +26222,7 @@
         <p:txBody>
           <a:bodyPr/>
           <a:p>
-            <a:fld id="{4C3DEC42-6AFE-4157-A38A-B26D1ACBFB91}" type="slidenum">
+            <a:fld id="{07D42178-3C1E-44F2-B075-19985615AC61}" type="slidenum">
               <a:t>13</a:t>
             </a:fld>
           </a:p>
@@ -26304,8 +26322,31 @@
         </p:blipFill>
         <p:spPr>
           <a:xfrm>
-            <a:off x="3240000" y="900000"/>
-            <a:ext cx="5400000" cy="5237640"/>
+            <a:off x="1059480" y="879480"/>
+            <a:ext cx="4802760" cy="5420520"/>
+          </a:xfrm>
+          <a:prstGeom prst="rect">
+            <a:avLst/>
+          </a:prstGeom>
+          <a:ln w="0">
+            <a:noFill/>
+          </a:ln>
+        </p:spPr>
+      </p:pic>
+      <p:pic>
+        <p:nvPicPr>
+          <p:cNvPr id="407" name="" descr=""/>
+          <p:cNvPicPr/>
+          <p:nvPr/>
+        </p:nvPicPr>
+        <p:blipFill>
+          <a:blip r:embed="rId2"/>
+          <a:stretch/>
+        </p:blipFill>
+        <p:spPr>
+          <a:xfrm>
+            <a:off x="7199280" y="882360"/>
+            <a:ext cx="3713760" cy="5417640"/>
           </a:xfrm>
           <a:prstGeom prst="rect">
             <a:avLst/>
@@ -26329,7 +26370,7 @@
         <p:txBody>
           <a:bodyPr/>
           <a:p>
-            <a:fld id="{B2231483-67F0-46A1-A31B-2B13D48CCA68}" type="slidenum">
+            <a:fld id="{281E615C-4BF4-4EA1-8A11-A6FE1307317E}" type="slidenum">
               <a:t>14</a:t>
             </a:fld>
           </a:p>
@@ -26367,7 +26408,7 @@
       </p:grpSpPr>
       <p:sp>
         <p:nvSpPr>
-          <p:cNvPr id="407" name="PlaceHolder 1"/>
+          <p:cNvPr id="408" name="PlaceHolder 1"/>
           <p:cNvSpPr>
             <a:spLocks noGrp="1"/>
           </p:cNvSpPr>
@@ -26406,7 +26447,7 @@
                 </a:solidFill>
                 <a:latin typeface="Calibri Light"/>
               </a:rPr>
-              <a:t>Работа алгоритма синхронизации  после разрешения конликта.</a:t>
+              <a:t>Работа алгоритма синхронизации после разрешения конликта.</a:t>
             </a:r>
             <a:endParaRPr b="0" lang="en-US" sz="3600" spc="-1" strike="noStrike">
               <a:solidFill>
@@ -26419,7 +26460,7 @@
       </p:sp>
       <p:pic>
         <p:nvPicPr>
-          <p:cNvPr id="408" name="" descr=""/>
+          <p:cNvPr id="409" name="" descr=""/>
           <p:cNvPicPr/>
           <p:nvPr/>
         </p:nvPicPr>
@@ -26430,7 +26471,7 @@
         <p:spPr>
           <a:xfrm>
             <a:off x="7560000" y="86400"/>
-            <a:ext cx="3600000" cy="6573600"/>
+            <a:ext cx="3600000" cy="6393600"/>
           </a:xfrm>
           <a:prstGeom prst="rect">
             <a:avLst/>
@@ -26454,7 +26495,7 @@
         <p:txBody>
           <a:bodyPr/>
           <a:p>
-            <a:fld id="{1CA47621-68F1-4539-8A3C-F7A903FB3C2B}" type="slidenum">
+            <a:fld id="{A4A79183-B154-4E96-A5B1-A8BA08E550F1}" type="slidenum">
               <a:t>15</a:t>
             </a:fld>
           </a:p>
@@ -26492,7 +26533,7 @@
       </p:grpSpPr>
       <p:sp>
         <p:nvSpPr>
-          <p:cNvPr id="409" name="PlaceHolder 1"/>
+          <p:cNvPr id="410" name="PlaceHolder 1"/>
           <p:cNvSpPr>
             <a:spLocks noGrp="1"/>
           </p:cNvSpPr>
@@ -26544,7 +26585,7 @@
       </p:sp>
       <p:sp>
         <p:nvSpPr>
-          <p:cNvPr id="410" name="Объект 11"/>
+          <p:cNvPr id="411" name="Объект 11"/>
           <p:cNvSpPr/>
           <p:nvPr/>
         </p:nvSpPr>
@@ -26874,7 +26915,7 @@
         <p:txBody>
           <a:bodyPr/>
           <a:p>
-            <a:fld id="{C854872C-8F8D-431A-B1B0-D328D6A96C68}" type="slidenum">
+            <a:fld id="{F10A3D6F-2B9D-48C2-8CDC-7ED3C3155A17}" type="slidenum">
               <a:t>16</a:t>
             </a:fld>
           </a:p>
@@ -26912,7 +26953,7 @@
       </p:grpSpPr>
       <p:pic>
         <p:nvPicPr>
-          <p:cNvPr id="411" name="" descr=""/>
+          <p:cNvPr id="412" name="" descr=""/>
           <p:cNvPicPr/>
           <p:nvPr/>
         </p:nvPicPr>
@@ -26953,7 +26994,7 @@
         <p:txBody>
           <a:bodyPr/>
           <a:p>
-            <a:fld id="{568D7FF8-FAD0-48EF-9BD9-8837B7640DAE}" type="slidenum">
+            <a:fld id="{62B117FE-A7B0-4C65-B508-485B00A7C9E1}" type="slidenum">
               <a:t>17</a:t>
             </a:fld>
           </a:p>
@@ -26991,7 +27032,7 @@
       </p:grpSpPr>
       <p:sp>
         <p:nvSpPr>
-          <p:cNvPr id="412" name="PlaceHolder 1"/>
+          <p:cNvPr id="413" name="PlaceHolder 1"/>
           <p:cNvSpPr>
             <a:spLocks noGrp="1"/>
           </p:cNvSpPr>
@@ -27043,7 +27084,7 @@
       </p:sp>
       <p:pic>
         <p:nvPicPr>
-          <p:cNvPr id="413" name="" descr=""/>
+          <p:cNvPr id="414" name="" descr=""/>
           <p:cNvPicPr/>
           <p:nvPr/>
         </p:nvPicPr>
@@ -27084,7 +27125,7 @@
         <p:txBody>
           <a:bodyPr/>
           <a:p>
-            <a:fld id="{8D6D9F3A-5524-4C1F-B8A4-021B8485203F}" type="slidenum">
+            <a:fld id="{8157F3FE-F27F-4FF1-A633-6461B4D99065}" type="slidenum">
               <a:t>18</a:t>
             </a:fld>
           </a:p>
@@ -27122,7 +27163,7 @@
       </p:grpSpPr>
       <p:sp>
         <p:nvSpPr>
-          <p:cNvPr id="414" name="PlaceHolder 1"/>
+          <p:cNvPr id="415" name="PlaceHolder 1"/>
           <p:cNvSpPr>
             <a:spLocks noGrp="1"/>
           </p:cNvSpPr>
@@ -27174,7 +27215,7 @@
       </p:sp>
       <p:pic>
         <p:nvPicPr>
-          <p:cNvPr id="415" name="" descr=""/>
+          <p:cNvPr id="416" name="" descr=""/>
           <p:cNvPicPr/>
           <p:nvPr/>
         </p:nvPicPr>
@@ -27197,7 +27238,7 @@
       </p:pic>
       <p:sp>
         <p:nvSpPr>
-          <p:cNvPr id="416" name="Заголовок 12"/>
+          <p:cNvPr id="417" name="Заголовок 12"/>
           <p:cNvSpPr txBox="1"/>
           <p:nvPr/>
         </p:nvSpPr>
@@ -27256,7 +27297,7 @@
         <p:txBody>
           <a:bodyPr/>
           <a:p>
-            <a:fld id="{BB1C50C9-ECD7-43CD-A899-53E78403BE1D}" type="slidenum">
+            <a:fld id="{4A38A801-9785-462E-B7E6-DCB6A74718C1}" type="slidenum">
               <a:t>19</a:t>
             </a:fld>
           </a:p>
@@ -27627,7 +27668,7 @@
                 </a:solidFill>
                 <a:latin typeface="Arial"/>
               </a:rPr>
-              <a:t>9 рисунка</a:t>
+              <a:t>9 рисунков</a:t>
             </a:r>
             <a:endParaRPr b="0" lang="ru-RU" sz="2000" spc="-1" strike="noStrike">
               <a:solidFill>
@@ -27735,7 +27776,7 @@
         <p:txBody>
           <a:bodyPr/>
           <a:p>
-            <a:fld id="{4CFEBFDF-5CDB-4297-89E3-5AB1E88BF11A}" type="slidenum">
+            <a:fld id="{6B908F36-0A81-45AE-B6C6-6039EE28C28C}" type="slidenum">
               <a:t>2</a:t>
             </a:fld>
           </a:p>
@@ -27773,7 +27814,7 @@
       </p:grpSpPr>
       <p:sp>
         <p:nvSpPr>
-          <p:cNvPr id="417" name="PlaceHolder 1"/>
+          <p:cNvPr id="418" name="PlaceHolder 1"/>
           <p:cNvSpPr>
             <a:spLocks noGrp="1"/>
           </p:cNvSpPr>
@@ -27825,7 +27866,7 @@
       </p:sp>
       <p:sp>
         <p:nvSpPr>
-          <p:cNvPr id="418" name="TextBox 16"/>
+          <p:cNvPr id="419" name="TextBox 16"/>
           <p:cNvSpPr/>
           <p:nvPr/>
         </p:nvSpPr>
@@ -27869,7 +27910,7 @@
       </p:sp>
       <p:pic>
         <p:nvPicPr>
-          <p:cNvPr id="419" name="" descr=""/>
+          <p:cNvPr id="420" name="" descr=""/>
           <p:cNvPicPr/>
           <p:nvPr/>
         </p:nvPicPr>
@@ -27904,7 +27945,7 @@
         <p:txBody>
           <a:bodyPr/>
           <a:p>
-            <a:fld id="{366CE2C0-EE0F-49D5-BE11-20209D5F3760}" type="slidenum">
+            <a:fld id="{5D164367-36F5-41B5-9BE2-B84CE160F89A}" type="slidenum">
               <a:t>20</a:t>
             </a:fld>
           </a:p>
@@ -27942,7 +27983,7 @@
       </p:grpSpPr>
       <p:sp>
         <p:nvSpPr>
-          <p:cNvPr id="420" name="PlaceHolder 1"/>
+          <p:cNvPr id="421" name="PlaceHolder 1"/>
           <p:cNvSpPr>
             <a:spLocks noGrp="1"/>
           </p:cNvSpPr>
@@ -27994,7 +28035,7 @@
       </p:sp>
       <p:pic>
         <p:nvPicPr>
-          <p:cNvPr id="421" name="" descr=""/>
+          <p:cNvPr id="422" name="" descr=""/>
           <p:cNvPicPr/>
           <p:nvPr/>
         </p:nvPicPr>
@@ -28029,7 +28070,7 @@
         <p:txBody>
           <a:bodyPr/>
           <a:p>
-            <a:fld id="{4A20DE00-EFA4-4EB6-8C0A-DC6E55B625AA}" type="slidenum">
+            <a:fld id="{B89A3B8F-0902-4AA7-BCE3-CAD07AABA8D6}" type="slidenum">
               <a:t>21</a:t>
             </a:fld>
           </a:p>
@@ -28067,7 +28108,7 @@
       </p:grpSpPr>
       <p:sp>
         <p:nvSpPr>
-          <p:cNvPr id="422" name="TextBox 4"/>
+          <p:cNvPr id="423" name="TextBox 4"/>
           <p:cNvSpPr/>
           <p:nvPr/>
         </p:nvSpPr>
@@ -28120,7 +28161,7 @@
       </p:sp>
       <p:pic>
         <p:nvPicPr>
-          <p:cNvPr id="423" name="Рисунок 1" descr=""/>
+          <p:cNvPr id="424" name="Рисунок 1" descr=""/>
           <p:cNvPicPr/>
           <p:nvPr/>
         </p:nvPicPr>
@@ -28155,7 +28196,7 @@
         <p:txBody>
           <a:bodyPr/>
           <a:p>
-            <a:fld id="{41D15435-6E1C-4A9A-A026-56369366A622}" type="slidenum">
+            <a:fld id="{09E4E2DE-4587-4ED9-A2F1-E80F01111847}" type="slidenum">
               <a:t>22</a:t>
             </a:fld>
           </a:p>
@@ -28296,7 +28337,16 @@
                 </a:solidFill>
                 <a:latin typeface="Arial"/>
               </a:rPr>
-              <a:t>Использование человеком множества различных устройств</a:t>
+              <a:t>Использование человеком </a:t>
+            </a:r>
+            <a:r>
+              <a:rPr b="0" lang="ru-RU" sz="2400" spc="-1" strike="noStrike">
+                <a:solidFill>
+                  <a:srgbClr val="1f2b6d"/>
+                </a:solidFill>
+                <a:latin typeface="Arial"/>
+              </a:rPr>
+              <a:t>множества различных устройств</a:t>
             </a:r>
             <a:endParaRPr b="0" lang="en-US" sz="2400" spc="-1" strike="noStrike">
               <a:solidFill>
@@ -28326,7 +28376,16 @@
                 </a:solidFill>
                 <a:latin typeface="Arial"/>
               </a:rPr>
-              <a:t>Рост потребности в мобильном доступе</a:t>
+              <a:t>Рост потребности в мобильном </a:t>
+            </a:r>
+            <a:r>
+              <a:rPr b="0" lang="ru-RU" sz="2400" spc="-1" strike="noStrike">
+                <a:solidFill>
+                  <a:srgbClr val="1f2b6d"/>
+                </a:solidFill>
+                <a:latin typeface="Arial"/>
+              </a:rPr>
+              <a:t>доступе</a:t>
             </a:r>
             <a:endParaRPr b="0" lang="en-US" sz="2400" spc="-1" strike="noStrike">
               <a:solidFill>
@@ -28356,7 +28415,43 @@
                 </a:solidFill>
                 <a:latin typeface="Arial"/>
               </a:rPr>
-              <a:t>Потребность в согласованности данных, которую не предоставляют распространенные аналоги(Google Drive)</a:t>
+              <a:t>Потребность в согласованности </a:t>
+            </a:r>
+            <a:r>
+              <a:rPr b="0" lang="ru-RU" sz="2400" spc="-1" strike="noStrike">
+                <a:solidFill>
+                  <a:srgbClr val="1f2b6d"/>
+                </a:solidFill>
+                <a:latin typeface="Arial"/>
+              </a:rPr>
+              <a:t>данных, которую не </a:t>
+            </a:r>
+            <a:r>
+              <a:rPr b="0" lang="ru-RU" sz="2400" spc="-1" strike="noStrike">
+                <a:solidFill>
+                  <a:srgbClr val="1f2b6d"/>
+                </a:solidFill>
+                <a:latin typeface="Arial"/>
+              </a:rPr>
+              <a:t>предоставляют </a:t>
+            </a:r>
+            <a:r>
+              <a:rPr b="0" lang="ru-RU" sz="2400" spc="-1" strike="noStrike">
+                <a:solidFill>
+                  <a:srgbClr val="1f2b6d"/>
+                </a:solidFill>
+                <a:latin typeface="Arial"/>
+              </a:rPr>
+              <a:t>распространенные </a:t>
+            </a:r>
+            <a:r>
+              <a:rPr b="0" lang="ru-RU" sz="2400" spc="-1" strike="noStrike">
+                <a:solidFill>
+                  <a:srgbClr val="1f2b6d"/>
+                </a:solidFill>
+                <a:latin typeface="Arial"/>
+              </a:rPr>
+              <a:t>аналоги(Google Drive)</a:t>
             </a:r>
             <a:endParaRPr b="0" lang="en-US" sz="2400" spc="-1" strike="noStrike">
               <a:solidFill>
@@ -28386,7 +28481,25 @@
                 </a:solidFill>
                 <a:latin typeface="Arial"/>
               </a:rPr>
-              <a:t>Необходимость: удобный интерфейс, отвечающий всем требованиям</a:t>
+              <a:t>Необходимость: удобный </a:t>
+            </a:r>
+            <a:r>
+              <a:rPr b="0" lang="ru-RU" sz="2400" spc="-1" strike="noStrike">
+                <a:solidFill>
+                  <a:srgbClr val="1f2b6d"/>
+                </a:solidFill>
+                <a:latin typeface="Arial"/>
+              </a:rPr>
+              <a:t>интерфейс, отвечающий всем </a:t>
+            </a:r>
+            <a:r>
+              <a:rPr b="0" lang="ru-RU" sz="2400" spc="-1" strike="noStrike">
+                <a:solidFill>
+                  <a:srgbClr val="1f2b6d"/>
+                </a:solidFill>
+                <a:latin typeface="Arial"/>
+              </a:rPr>
+              <a:t>требованиям</a:t>
             </a:r>
             <a:endParaRPr b="0" lang="en-US" sz="2400" spc="-1" strike="noStrike">
               <a:solidFill>
@@ -28411,7 +28524,7 @@
         <p:txBody>
           <a:bodyPr/>
           <a:p>
-            <a:fld id="{A1C15B03-9CFE-4978-AB8D-D62E2D73CC5A}" type="slidenum">
+            <a:fld id="{C339B641-0CB8-4A60-ACB5-9171515520EC}" type="slidenum">
               <a:t>3</a:t>
             </a:fld>
           </a:p>
@@ -28771,7 +28884,7 @@
         <p:spPr>
           <a:xfrm>
             <a:off x="4750560" y="1993680"/>
-            <a:ext cx="3108960" cy="3413160"/>
+            <a:ext cx="3108960" cy="3411000"/>
           </a:xfrm>
           <a:prstGeom prst="roundRect">
             <a:avLst>
@@ -28844,7 +28957,7 @@
                 </a:solidFill>
                 <a:latin typeface="Arial"/>
               </a:rPr>
-              <a:t>модели метаданных для контент-адресуемого хранения и версионирования файлов, алгоритмы синхронизации, а также и программные интерфейсы (REST API) взаимодействия узлов синхронизации.</a:t>
+              <a:t>модели метаданных для контент-адресуемого хранения и версионирования файлов, алгоритмы синхронизации, а также и программные интерфейсы взаимодействия узлов синхронизации.</a:t>
             </a:r>
             <a:endParaRPr b="0" lang="ru-RU" sz="1800" spc="-1" strike="noStrike">
               <a:solidFill>
@@ -28926,7 +29039,7 @@
         <p:spPr>
           <a:xfrm>
             <a:off x="8192160" y="1993680"/>
-            <a:ext cx="3346560" cy="4807080"/>
+            <a:ext cx="3346560" cy="3988080"/>
           </a:xfrm>
           <a:prstGeom prst="roundRect">
             <a:avLst>
@@ -28983,7 +29096,7 @@
                 </a:solidFill>
                 <a:latin typeface="Arial"/>
               </a:rPr>
-              <a:t>и реализовать рограммный прототип системы синхронизации файлов на платформе .NET с использованием пользовательского интерфейса, обеспечивающий распределённое хранение  данных, контроль версий и корректное разрешение конфликтов при одновременном изменении файлов на разных узлах.</a:t>
+              <a:t>и реализовать рограммный прототип системы синхронизации файлов на платформе .NET , обеспечивающий распределённое хранение  данных, контроль версий и корректное разрешение конфликтов при одновременном изменении файлов на разных узлах.</a:t>
             </a:r>
             <a:r>
               <a:rPr b="1" lang="ru-RU" sz="1800" spc="-1" strike="noStrike">
@@ -29017,7 +29130,7 @@
         <p:txBody>
           <a:bodyPr/>
           <a:p>
-            <a:fld id="{5BC8CE68-8924-4D60-A260-2EC1FDF1F2C2}" type="slidenum">
+            <a:fld id="{E4EBB982-3CD2-438F-8DC0-CF20CE2AFDA7}" type="slidenum">
               <a:t>4</a:t>
             </a:fld>
           </a:p>
@@ -29304,7 +29417,7 @@
         <p:txBody>
           <a:bodyPr/>
           <a:p>
-            <a:fld id="{661EE6C9-7AC0-4E08-B692-1CBBC1EB7C0E}" type="slidenum">
+            <a:fld id="{EE52C1D7-4407-4B05-A9E6-9FAA7179B457}" type="slidenum">
               <a:t>5</a:t>
             </a:fld>
           </a:p>
@@ -29462,7 +29575,16 @@
                 </a:solidFill>
                 <a:latin typeface="Arial"/>
               </a:rPr>
-              <a:t>Прямая работа с файловой системой:</a:t>
+              <a:t>Прямая работа с файловой </a:t>
+            </a:r>
+            <a:r>
+              <a:rPr b="1" lang="ru-RU" sz="2400" spc="-1" strike="noStrike">
+                <a:solidFill>
+                  <a:srgbClr val="1f2b6d"/>
+                </a:solidFill>
+                <a:latin typeface="Arial"/>
+              </a:rPr>
+              <a:t>системой:</a:t>
             </a:r>
             <a:r>
               <a:rPr b="0" lang="ru-RU" sz="2400" spc="-1" strike="noStrike">
@@ -29471,7 +29593,16 @@
                 </a:solidFill>
                 <a:latin typeface="Arial"/>
               </a:rPr>
-              <a:t> просто но есть риск потери данных</a:t>
+              <a:t> просто но есть риск </a:t>
+            </a:r>
+            <a:r>
+              <a:rPr b="0" lang="ru-RU" sz="2400" spc="-1" strike="noStrike">
+                <a:solidFill>
+                  <a:srgbClr val="1f2b6d"/>
+                </a:solidFill>
+                <a:latin typeface="Arial"/>
+              </a:rPr>
+              <a:t>потери данных</a:t>
             </a:r>
             <a:endParaRPr b="0" lang="en-US" sz="2400" spc="-1" strike="noStrike">
               <a:solidFill>
@@ -29509,7 +29640,34 @@
                 </a:solidFill>
                 <a:latin typeface="Arial"/>
               </a:rPr>
-              <a:t> удобно в использовании, но требует архитектурно-зависимых компонент. Не переносимо.</a:t>
+              <a:t> </a:t>
+            </a:r>
+            <a:r>
+              <a:rPr b="0" lang="ru-RU" sz="2400" spc="-1" strike="noStrike">
+                <a:solidFill>
+                  <a:srgbClr val="1f2b6d"/>
+                </a:solidFill>
+                <a:latin typeface="Arial"/>
+              </a:rPr>
+              <a:t>удобно в использовании, но требует </a:t>
+            </a:r>
+            <a:r>
+              <a:rPr b="0" lang="ru-RU" sz="2400" spc="-1" strike="noStrike">
+                <a:solidFill>
+                  <a:srgbClr val="1f2b6d"/>
+                </a:solidFill>
+                <a:latin typeface="Arial"/>
+              </a:rPr>
+              <a:t>архитектурно-зависимых компонент. </a:t>
+            </a:r>
+            <a:r>
+              <a:rPr b="0" lang="ru-RU" sz="2400" spc="-1" strike="noStrike">
+                <a:solidFill>
+                  <a:srgbClr val="1f2b6d"/>
+                </a:solidFill>
+                <a:latin typeface="Arial"/>
+              </a:rPr>
+              <a:t>Не переносимо.</a:t>
             </a:r>
             <a:endParaRPr b="0" lang="en-US" sz="2400" spc="-1" strike="noStrike">
               <a:solidFill>
@@ -29538,7 +29696,16 @@
                 </a:solidFill>
                 <a:latin typeface="Arial"/>
               </a:rPr>
-              <a:t>Внутреннее хранилище приложения:</a:t>
+              <a:t>Внутреннее хранилище </a:t>
+            </a:r>
+            <a:r>
+              <a:rPr b="1" lang="ru-RU" sz="2400" spc="-1" strike="noStrike">
+                <a:solidFill>
+                  <a:srgbClr val="1f2b6d"/>
+                </a:solidFill>
+                <a:latin typeface="Arial"/>
+              </a:rPr>
+              <a:t>приложения:</a:t>
             </a:r>
             <a:r>
               <a:rPr b="0" lang="ru-RU" sz="2400" spc="-1" strike="noStrike">
@@ -29547,7 +29714,25 @@
                 </a:solidFill>
                 <a:latin typeface="Arial"/>
               </a:rPr>
-              <a:t> дублирование данных, но простота реализации и безопасность</a:t>
+              <a:t> дублирование </a:t>
+            </a:r>
+            <a:r>
+              <a:rPr b="0" lang="ru-RU" sz="2400" spc="-1" strike="noStrike">
+                <a:solidFill>
+                  <a:srgbClr val="1f2b6d"/>
+                </a:solidFill>
+                <a:latin typeface="Arial"/>
+              </a:rPr>
+              <a:t>данных, но простота реализации и </a:t>
+            </a:r>
+            <a:r>
+              <a:rPr b="0" lang="ru-RU" sz="2400" spc="-1" strike="noStrike">
+                <a:solidFill>
+                  <a:srgbClr val="1f2b6d"/>
+                </a:solidFill>
+                <a:latin typeface="Arial"/>
+              </a:rPr>
+              <a:t>безопасность</a:t>
             </a:r>
             <a:endParaRPr b="0" lang="en-US" sz="2400" spc="-1" strike="noStrike">
               <a:solidFill>
@@ -29646,7 +29831,7 @@
         <p:txBody>
           <a:bodyPr/>
           <a:p>
-            <a:fld id="{A5F68FC6-17FB-490D-8EAD-63B1B7DB0673}" type="slidenum">
+            <a:fld id="{0366F615-06B4-489D-B790-513E60E75746}" type="slidenum">
               <a:t>6</a:t>
             </a:fld>
           </a:p>
@@ -29738,7 +29923,7 @@
                 </a:solidFill>
                 <a:latin typeface="Calibri Light"/>
               </a:rPr>
-              <a:t>Результаты анализа средств средств обмена инфомацией</a:t>
+              <a:t>Результаты анализа средств обмена инфомацией</a:t>
             </a:r>
             <a:br>
               <a:rPr sz="3600"/>
@@ -29988,7 +30173,7 @@
         <p:txBody>
           <a:bodyPr/>
           <a:p>
-            <a:fld id="{E03B39BC-AB22-48BD-BCD1-04DF5504ED2A}" type="slidenum">
+            <a:fld id="{BA4D10B3-1064-4A9F-8BBB-8AEC2E78E843}" type="slidenum">
               <a:t>7</a:t>
             </a:fld>
           </a:p>
@@ -30214,7 +30399,7 @@
         <p:txBody>
           <a:bodyPr/>
           <a:p>
-            <a:fld id="{67A2DD68-381C-4D67-8B6E-E3221ABF1CF4}" type="slidenum">
+            <a:fld id="{E3D6B13F-8410-49D6-A2C0-C3D85A2EABB2}" type="slidenum">
               <a:t>8</a:t>
             </a:fld>
           </a:p>
@@ -30607,7 +30792,25 @@
                 </a:solidFill>
                 <a:latin typeface="Arial"/>
               </a:rPr>
-              <a:t>Приемущества SVN над Git</a:t>
+              <a:t>Приемущест</a:t>
+            </a:r>
+            <a:r>
+              <a:rPr b="0" lang="ru-RU" sz="2600" spc="-1" strike="noStrike">
+                <a:solidFill>
+                  <a:srgbClr val="1f2b6d"/>
+                </a:solidFill>
+                <a:latin typeface="Arial"/>
+              </a:rPr>
+              <a:t>ва SVN над </a:t>
+            </a:r>
+            <a:r>
+              <a:rPr b="0" lang="ru-RU" sz="2600" spc="-1" strike="noStrike">
+                <a:solidFill>
+                  <a:srgbClr val="1f2b6d"/>
+                </a:solidFill>
+                <a:latin typeface="Arial"/>
+              </a:rPr>
+              <a:t>Git</a:t>
             </a:r>
             <a:endParaRPr b="0" lang="en-US" sz="2600" spc="-1" strike="noStrike">
               <a:solidFill>
@@ -30632,7 +30835,7 @@
         <p:txBody>
           <a:bodyPr/>
           <a:p>
-            <a:fld id="{9E3CEE85-3FD4-4847-A376-F3B1DD875819}" type="slidenum">
+            <a:fld id="{4BCF952A-D20C-4A10-AD54-CD64D7849322}" type="slidenum">
               <a:t>9</a:t>
             </a:fld>
           </a:p>
